--- a/assets/powerpoints/module-n1-orientation/A3-majuscules-et-minuscules.pptx
+++ b/assets/powerpoints/module-n1-orientation/A3-majuscules-et-minuscules.pptx
@@ -11301,7 +11301,7 @@
                 </a:solidFill>
                 <a:latin typeface="Verdana"/>
               </a:rPr>
-              <a:t>la petite salle avec les lavabos</a:t>
+              <a:t>un dessin d'homme ou de femme sur la porte</a:t>
             </a:r>
           </a:p>
         </p:txBody>
@@ -11421,7 +11421,7 @@
                 </a:solidFill>
                 <a:latin typeface="Verdana"/>
               </a:rPr>
-              <a:t>la grande salle où on mange, le midi</a:t>
+              <a:t>un dessin de fourchette ; des tables, pour le dîner</a:t>
             </a:r>
           </a:p>
         </p:txBody>
@@ -11541,7 +11541,7 @@
                 </a:solidFill>
                 <a:latin typeface="Verdana"/>
               </a:rPr>
-              <a:t>le premier comptoir, après la porte d'entrée</a:t>
+              <a:t>après la porte, quelqu'un répond aux questions</a:t>
             </a:r>
           </a:p>
         </p:txBody>
@@ -11661,7 +11661,7 @@
                 </a:solidFill>
                 <a:latin typeface="Verdana"/>
               </a:rPr>
-              <a:t>la porte par où on part</a:t>
+              <a:t>un dessin vert : quelqu'un qui court</a:t>
             </a:r>
           </a:p>
         </p:txBody>

--- a/assets/powerpoints/module-n1-orientation/A3-majuscules-et-minuscules.pptx
+++ b/assets/powerpoints/module-n1-orientation/A3-majuscules-et-minuscules.pptx
@@ -7638,7 +7638,43 @@
                 </a:solidFill>
                 <a:latin typeface="Verdana"/>
               </a:rPr>
-              <a:t>La grande s'appelle une &lt;b&gt;majuscule&lt;/b&gt;, la petite une &lt;b&gt;minuscule&lt;/b&gt;. Les panneaux prennent les grandes, pour qu'on les voie de loin. Les cahiers et les livres prennent les petites.</a:t>
+              <a:t>La grande s'appelle une </a:t>
+            </a:r>
+            <a:r>
+              <a:rPr sz="2000" b="1" i="0">
+                <a:solidFill>
+                  <a:srgbClr val="4B4F52"/>
+                </a:solidFill>
+                <a:latin typeface="Verdana"/>
+              </a:rPr>
+              <a:t>majuscule</a:t>
+            </a:r>
+            <a:r>
+              <a:rPr sz="2000" b="0" i="0">
+                <a:solidFill>
+                  <a:srgbClr val="4B4F52"/>
+                </a:solidFill>
+                <a:latin typeface="Verdana"/>
+              </a:rPr>
+              <a:t>, la petite une </a:t>
+            </a:r>
+            <a:r>
+              <a:rPr sz="2000" b="1" i="0">
+                <a:solidFill>
+                  <a:srgbClr val="4B4F52"/>
+                </a:solidFill>
+                <a:latin typeface="Verdana"/>
+              </a:rPr>
+              <a:t>minuscule</a:t>
+            </a:r>
+            <a:r>
+              <a:rPr sz="2000" b="0" i="0">
+                <a:solidFill>
+                  <a:srgbClr val="4B4F52"/>
+                </a:solidFill>
+                <a:latin typeface="Verdana"/>
+              </a:rPr>
+              <a:t>. Les panneaux prennent les grandes, pour qu'on les voie de loin. Les cahiers et les livres prennent les petites.</a:t>
             </a:r>
           </a:p>
         </p:txBody>
